--- a/Topic_A/Exam_Practice/AT-A-L01_Writing_Workshop_Time_and_Daily_Routine.pptx
+++ b/Topic_A/Exam_Practice/AT-A-L01_Writing_Workshop_Time_and_Daily_Routine.pptx
@@ -784,7 +784,11 @@
           <a:lstStyle/>
           <a:p>
             <a:r>
-              <a:rPr lang="en-US" dirty="0"/>
+              <a:rPr lang="ar-SA" dirty="0">
+                <a:latin typeface="Amiri" pitchFamily="2" charset="-78"/>
+                <a:ea typeface="Amiri" pitchFamily="2" charset="-78"/>
+                <a:cs typeface="Amiri" pitchFamily="2" charset="-78"/>
+              </a:rPr>
               <a:t>Q3 (3 min to choose and read). Title (أ) suits Core and Develop (it follows the AT-A-L01 language closely); title (ب) suits Stretch (comparison with ammā … fa-, preference with a reason, a conditional).</a:t>
             </a:r>
             <a:endParaRPr lang="en-US" dirty="0"/>
@@ -1401,7 +1405,11 @@
           <a:lstStyle/>
           <a:p>
             <a:r>
-              <a:rPr lang="en-US" dirty="0"/>
+              <a:rPr lang="ar-SA" dirty="0">
+                <a:latin typeface="Amiri" pitchFamily="2" charset="-78"/>
+                <a:ea typeface="Amiri" pitchFamily="2" charset="-78"/>
+                <a:cs typeface="Amiri" pitchFamily="2" charset="-78"/>
+              </a:rPr>
               <a:t>WELCOME (1 min) — while students join.
 • Greet each student by name as they arrive: السَّلَامُ عَلَيْكُمْ. Take the register (Pastoral Tracker: attendance 0/1).
 • 2-MINUTE CHECK-IN (SEND training): a private chat to any student who seemed unsettled last lesson — “Are you okay today? 👍 / 👎”.
@@ -1670,7 +1678,11 @@
           <a:lstStyle/>
           <a:p>
             <a:r>
-              <a:rPr lang="en-US" dirty="0"/>
+              <a:rPr lang="ar-SA" dirty="0">
+                <a:latin typeface="Amiri" pitchFamily="2" charset="-78"/>
+                <a:ea typeface="Amiri" pitchFamily="2" charset="-78"/>
+                <a:cs typeface="Amiri" pitchFamily="2" charset="-78"/>
+              </a:rPr>
               <a:t>QUESTION 1 — FORM FILLING. About 8 minutes. Core: boxes 1–6 (single words or phrases). Develop / Stretch: all 8, with the last answer as a full sentence. Remind students to answer in ARABIC and to match the question (a time for a time, a place for a place). Nationality must agree with the writer: بِرِيطَانِيٌّ (boy) / بِرِيطَانِيَّةٌ (girl).</a:t>
             </a:r>
             <a:endParaRPr lang="en-US" dirty="0"/>
@@ -1846,7 +1858,11 @@
           <a:lstStyle/>
           <a:p>
             <a:r>
-              <a:rPr lang="en-US" dirty="0"/>
+              <a:rPr lang="ar-SA" dirty="0">
+                <a:latin typeface="Amiri" pitchFamily="2" charset="-78"/>
+                <a:ea typeface="Amiri" pitchFamily="2" charset="-78"/>
+                <a:cs typeface="Amiri" pitchFamily="2" charset="-78"/>
+              </a:rPr>
               <a:t>Q2 TASK (3 min to read and plan). Students number the four bullets 1–4 in the margin and tick each one as they write it. To a boy pen friend: أُخْبِرَكَ; to a girl: أُخْبِرَكِ.</a:t>
             </a:r>
             <a:endParaRPr lang="en-US" dirty="0"/>
@@ -1934,7 +1950,11 @@
           <a:lstStyle/>
           <a:p>
             <a:r>
-              <a:rPr lang="en-US" dirty="0"/>
+              <a:rPr lang="ar-SA" dirty="0">
+                <a:latin typeface="Amiri" pitchFamily="2" charset="-78"/>
+                <a:ea typeface="Amiri" pitchFamily="2" charset="-78"/>
+                <a:cs typeface="Amiri" pitchFamily="2" charset="-78"/>
+              </a:rPr>
               <a:t>Recognising the question words is the key Core skill: مَتَى (when) · كَيْفَ (how) · مَاذَا (what) · لِمَاذَا (why).</a:t>
             </a:r>
             <a:endParaRPr lang="en-US" dirty="0"/>
@@ -2506,6 +2526,7 @@
                   <a:srgbClr val="D4AF37"/>
                 </a:solidFill>
                 <a:latin typeface="Amiri" pitchFamily="2" charset="-78"/>
+                <a:ea typeface="Amiri" pitchFamily="2" charset="-78"/>
                 <a:cs typeface="Amiri" pitchFamily="2" charset="-78"/>
               </a:rPr>
               <a:t>م</a:t>
@@ -2712,6 +2733,7 @@
                   <a:srgbClr val="D4AF37"/>
                 </a:solidFill>
                 <a:latin typeface="Amiri" pitchFamily="2" charset="-78"/>
+                <a:ea typeface="Amiri" pitchFamily="2" charset="-78"/>
                 <a:cs typeface="Amiri" pitchFamily="2" charset="-78"/>
               </a:rPr>
               <a:t>وَرْشَةُ الكِتَابَةِ — الوَقْتُ وَالرُّوتِينُ اليَوْمِيُّ</a:t>
@@ -3169,6 +3191,7 @@
                   <a:srgbClr val="D4AF37"/>
                 </a:solidFill>
                 <a:latin typeface="Amiri" pitchFamily="2" charset="-78"/>
+                <a:ea typeface="Amiri" pitchFamily="2" charset="-78"/>
                 <a:cs typeface="Amiri" pitchFamily="2" charset="-78"/>
               </a:rPr>
               <a:t>م</a:t>
@@ -3489,6 +3512,7 @@
                   <a:srgbClr val="8A6D1E"/>
                 </a:solidFill>
                 <a:latin typeface="Amiri" pitchFamily="2" charset="-78"/>
+                <a:ea typeface="Amiri" pitchFamily="2" charset="-78"/>
                 <a:cs typeface="Amiri" pitchFamily="2" charset="-78"/>
               </a:rPr>
               <a:t>نَمُوذَجُ الإِجَابَةِ</a:t>
@@ -3602,6 +3626,7 @@
                   <a:srgbClr val="1F2A37"/>
                 </a:solidFill>
                 <a:latin typeface="Amiri" pitchFamily="2" charset="-78"/>
+                <a:ea typeface="Amiri" pitchFamily="2" charset="-78"/>
                 <a:cs typeface="Amiri" pitchFamily="2" charset="-78"/>
               </a:rPr>
               <a:t>مَرْحَبًا يَا مَرْيَمُ،</a:t>
@@ -3621,6 +3646,7 @@
                   <a:srgbClr val="1F2A37"/>
                 </a:solidFill>
                 <a:latin typeface="Amiri" pitchFamily="2" charset="-78"/>
+                <a:ea typeface="Amiri" pitchFamily="2" charset="-78"/>
                 <a:cs typeface="Amiri" pitchFamily="2" charset="-78"/>
               </a:rPr>
               <a:t>كَيْفَ حَالُكِ؟ أَنَا سَارَةُ. أُرِيدُ أَنْ أُخْبِرَكِ عَنْ يَوْمِي. أَسْتَيْقِظُ فِي السَّاعَةِ السَّادِسَةِ وَالنِّصْفِ. أَوَّلًا أَغْتَسِلُ، ثُمَّ أَتَنَاوَلُ الإِفْطَارَ وَأَشْرَبُ الحَلِيبَ. أَذْهَبُ إِلَى المَدْرَسَةِ بِالحَافِلَةِ مَعَ أَخِي، وَأَصِلُ فِي السَّاعَةِ الثَّامِنَةِ. فِي المَدْرَسَةِ أَدْرُسُ الرِّيَاضِيَّاتِ وَالعُلُومَ. بَعْدَ المَدْرَسَةِ أَتَنَاوَلُ الغَدَاءَ، ثُمَّ أَدْرُسُ. فِي المَسَاءِ أُشَاهِدُ التِّلْفَازَ مَعَ أُسْرَتِي، وَأَنَامُ فِي السَّاعَةِ العَاشِرَةِ. أُحِبُّ رُوتِينِي لِأَنَّهُ سَهْلٌ وَمُنَظَّمٌ.</a:t>
@@ -3640,6 +3666,7 @@
                   <a:srgbClr val="1F2A37"/>
                 </a:solidFill>
                 <a:latin typeface="Amiri" pitchFamily="2" charset="-78"/>
+                <a:ea typeface="Amiri" pitchFamily="2" charset="-78"/>
                 <a:cs typeface="Amiri" pitchFamily="2" charset="-78"/>
               </a:rPr>
               <a:t>مَعَ السَّلَامَةِ،</a:t>
@@ -3659,6 +3686,7 @@
                   <a:srgbClr val="1F2A37"/>
                 </a:solidFill>
                 <a:latin typeface="Amiri" pitchFamily="2" charset="-78"/>
+                <a:ea typeface="Amiri" pitchFamily="2" charset="-78"/>
                 <a:cs typeface="Amiri" pitchFamily="2" charset="-78"/>
               </a:rPr>
               <a:t>سَارَةُ</a:t>
@@ -3822,11 +3850,12 @@
               <a:buNone/>
             </a:pPr>
             <a:r>
-              <a:rPr lang="en-US" sz="950" b="1" dirty="0">
+              <a:rPr lang="ar-SA" sz="950" b="1" dirty="0">
                 <a:solidFill>
                   <a:srgbClr val="FFFFFF"/>
                 </a:solidFill>
                 <a:latin typeface="Calibri" pitchFamily="34" charset="0"/>
+                <a:ea typeface="Amiri" pitchFamily="2" charset="-78"/>
                 <a:cs typeface="Amiri" pitchFamily="2" charset="-78"/>
               </a:rPr>
               <a:t>أَسْتَيْقِظُ</a:t>
@@ -3887,11 +3916,12 @@
               <a:buNone/>
             </a:pPr>
             <a:r>
-              <a:rPr lang="en-US" sz="950" b="1" dirty="0">
+              <a:rPr lang="ar-SA" sz="950" b="1" dirty="0">
                 <a:solidFill>
                   <a:srgbClr val="FFFFFF"/>
                 </a:solidFill>
                 <a:latin typeface="Calibri" pitchFamily="34" charset="0"/>
+                <a:ea typeface="Amiri" pitchFamily="2" charset="-78"/>
                 <a:cs typeface="Amiri" pitchFamily="2" charset="-78"/>
               </a:rPr>
               <a:t>أَوَّلًا … ثُمَّ</a:t>
@@ -3952,11 +3982,12 @@
               <a:buNone/>
             </a:pPr>
             <a:r>
-              <a:rPr lang="en-US" sz="950" b="1" dirty="0">
+              <a:rPr lang="ar-SA" sz="950" b="1" dirty="0">
                 <a:solidFill>
                   <a:srgbClr val="FFFFFF"/>
                 </a:solidFill>
                 <a:latin typeface="Calibri" pitchFamily="34" charset="0"/>
+                <a:ea typeface="Amiri" pitchFamily="2" charset="-78"/>
                 <a:cs typeface="Amiri" pitchFamily="2" charset="-78"/>
               </a:rPr>
               <a:t>بَعْدَ المَدْرَسَةِ</a:t>
@@ -4017,11 +4048,12 @@
               <a:buNone/>
             </a:pPr>
             <a:r>
-              <a:rPr lang="en-US" sz="950" b="1" dirty="0">
+              <a:rPr lang="ar-SA" sz="950" b="1" dirty="0">
                 <a:solidFill>
                   <a:srgbClr val="FFFFFF"/>
                 </a:solidFill>
                 <a:latin typeface="Calibri" pitchFamily="34" charset="0"/>
+                <a:ea typeface="Amiri" pitchFamily="2" charset="-78"/>
                 <a:cs typeface="Amiri" pitchFamily="2" charset="-78"/>
               </a:rPr>
               <a:t>لِأَنَّهُ</a:t>
@@ -4155,6 +4187,7 @@
                   <a:srgbClr val="D4AF37"/>
                 </a:solidFill>
                 <a:latin typeface="Amiri" pitchFamily="2" charset="-78"/>
+                <a:ea typeface="Amiri" pitchFamily="2" charset="-78"/>
                 <a:cs typeface="Amiri" pitchFamily="2" charset="-78"/>
               </a:rPr>
               <a:t>م</a:t>
@@ -4475,6 +4508,7 @@
                   <a:srgbClr val="8A6D1E"/>
                 </a:solidFill>
                 <a:latin typeface="Amiri" pitchFamily="2" charset="-78"/>
+                <a:ea typeface="Amiri" pitchFamily="2" charset="-78"/>
                 <a:cs typeface="Amiri" pitchFamily="2" charset="-78"/>
               </a:rPr>
               <a:t>نَمُوذَجُ الإِجَابَةِ</a:t>
@@ -4588,6 +4622,7 @@
                   <a:srgbClr val="1F2A37"/>
                 </a:solidFill>
                 <a:latin typeface="Amiri" pitchFamily="2" charset="-78"/>
+                <a:ea typeface="Amiri" pitchFamily="2" charset="-78"/>
                 <a:cs typeface="Amiri" pitchFamily="2" charset="-78"/>
               </a:rPr>
               <a:t>مَرْحَبًا يَا مَرْيَمُ،</a:t>
@@ -4607,6 +4642,7 @@
                   <a:srgbClr val="1F2A37"/>
                 </a:solidFill>
                 <a:latin typeface="Amiri" pitchFamily="2" charset="-78"/>
+                <a:ea typeface="Amiri" pitchFamily="2" charset="-78"/>
                 <a:cs typeface="Amiri" pitchFamily="2" charset="-78"/>
               </a:rPr>
               <a:t>كَيْفَ حَالُكِ؟ أُرِيدُ أَنْ أُخْبِرَكِ عَنْ يَوْمِي. فِي أَيَّامِ المَدْرَسَةِ أَسْتَيْقِظُ مُبَكِّرًا، فِي السَّاعَةِ السَّادِسَةِ وَالنِّصْفِ. أَوَّلًا أَغْتَسِلُ وَأَرْتَدِي مَلَابِسِي، ثُمَّ أَتَنَاوَلُ الإِفْطَارَ مَعَ أُسْرَتِي، لِأَنَّ الإِفْطَارَ مُهِمٌّ جِدًّا لِي. بَعْدَ ذٰلِكَ أَسْتَقِلُّ الحَافِلَةَ، وَأَصِلُ إِلَى المَدْرَسَةِ قَبْلَ الثَّامِنَةِ بِعَشْرِ دَقَائِقَ، وَتَبْدَأُ الدُّرُوسُ فِي الثَّامِنَةِ. بَعْدَ المَدْرَسَةِ أُنْهِي وَاجِبَاتِي، وَأَحْيَانًا أَلْعَبُ كُرَةَ السَّلَّةِ مَعَ صَدِيقَاتِي. فِي المَسَاءِ أَقْرَأُ قَلِيلًا، ثُمَّ أَنَامُ فِي السَّاعَةِ العَاشِرَةِ. فِي رَأْيِي رُوتِينِي مُفِيدٌ لِأَنَّهُ مُنَظَّمٌ، لٰكِنَّنِي أَشْعُرُ بِالتَّعَبِ أَحْيَانًا. وَأَنْتِ، كَيْفَ يَوْمُكِ؟ أَنْتَظِرُ رِسَالَتَكِ.</a:t>
@@ -4626,6 +4662,7 @@
                   <a:srgbClr val="1F2A37"/>
                 </a:solidFill>
                 <a:latin typeface="Amiri" pitchFamily="2" charset="-78"/>
+                <a:ea typeface="Amiri" pitchFamily="2" charset="-78"/>
                 <a:cs typeface="Amiri" pitchFamily="2" charset="-78"/>
               </a:rPr>
               <a:t>مَعَ تَحِيَّاتِي،</a:t>
@@ -4645,6 +4682,7 @@
                   <a:srgbClr val="1F2A37"/>
                 </a:solidFill>
                 <a:latin typeface="Amiri" pitchFamily="2" charset="-78"/>
+                <a:ea typeface="Amiri" pitchFamily="2" charset="-78"/>
                 <a:cs typeface="Amiri" pitchFamily="2" charset="-78"/>
               </a:rPr>
               <a:t>سَارَةُ</a:t>
@@ -4808,11 +4846,12 @@
               <a:buNone/>
             </a:pPr>
             <a:r>
-              <a:rPr lang="en-US" sz="950" b="1" dirty="0">
+              <a:rPr lang="ar-SA" sz="950" b="1" dirty="0">
                 <a:solidFill>
                   <a:srgbClr val="FFFFFF"/>
                 </a:solidFill>
                 <a:latin typeface="Calibri" pitchFamily="34" charset="0"/>
+                <a:ea typeface="Amiri" pitchFamily="2" charset="-78"/>
                 <a:cs typeface="Amiri" pitchFamily="2" charset="-78"/>
               </a:rPr>
               <a:t>مُبَكِّرًا</a:t>
@@ -4873,11 +4912,12 @@
               <a:buNone/>
             </a:pPr>
             <a:r>
-              <a:rPr lang="en-US" sz="950" b="1" dirty="0">
+              <a:rPr lang="ar-SA" sz="950" b="1" dirty="0">
                 <a:solidFill>
                   <a:srgbClr val="FFFFFF"/>
                 </a:solidFill>
                 <a:latin typeface="Calibri" pitchFamily="34" charset="0"/>
+                <a:ea typeface="Amiri" pitchFamily="2" charset="-78"/>
                 <a:cs typeface="Amiri" pitchFamily="2" charset="-78"/>
               </a:rPr>
               <a:t>بَعْدَ ذٰلِكَ</a:t>
@@ -4938,11 +4978,12 @@
               <a:buNone/>
             </a:pPr>
             <a:r>
-              <a:rPr lang="en-US" sz="950" b="1" dirty="0">
+              <a:rPr lang="ar-SA" sz="950" b="1" dirty="0">
                 <a:solidFill>
                   <a:srgbClr val="FFFFFF"/>
                 </a:solidFill>
                 <a:latin typeface="Calibri" pitchFamily="34" charset="0"/>
+                <a:ea typeface="Amiri" pitchFamily="2" charset="-78"/>
                 <a:cs typeface="Amiri" pitchFamily="2" charset="-78"/>
               </a:rPr>
               <a:t>وَأَحْيَانًا</a:t>
@@ -5003,11 +5044,12 @@
               <a:buNone/>
             </a:pPr>
             <a:r>
-              <a:rPr lang="en-US" sz="950" b="1" dirty="0">
+              <a:rPr lang="ar-SA" sz="950" b="1" dirty="0">
                 <a:solidFill>
                   <a:srgbClr val="FFFFFF"/>
                 </a:solidFill>
                 <a:latin typeface="Calibri" pitchFamily="34" charset="0"/>
+                <a:ea typeface="Amiri" pitchFamily="2" charset="-78"/>
                 <a:cs typeface="Amiri" pitchFamily="2" charset="-78"/>
               </a:rPr>
               <a:t>فِي رَأْيِي … لٰكِنَّنِي</a:t>
@@ -5141,6 +5183,7 @@
                   <a:srgbClr val="D4AF37"/>
                 </a:solidFill>
                 <a:latin typeface="Amiri" pitchFamily="2" charset="-78"/>
+                <a:ea typeface="Amiri" pitchFamily="2" charset="-78"/>
                 <a:cs typeface="Amiri" pitchFamily="2" charset="-78"/>
               </a:rPr>
               <a:t>م</a:t>
@@ -5461,6 +5504,7 @@
                   <a:srgbClr val="8A6D1E"/>
                 </a:solidFill>
                 <a:latin typeface="Amiri" pitchFamily="2" charset="-78"/>
+                <a:ea typeface="Amiri" pitchFamily="2" charset="-78"/>
                 <a:cs typeface="Amiri" pitchFamily="2" charset="-78"/>
               </a:rPr>
               <a:t>اخْتَرْ عُنْوَانًا وَاحِدًا</a:t>
@@ -5741,6 +5785,7 @@
                   <a:srgbClr val="1B3B6F"/>
                 </a:solidFill>
                 <a:latin typeface="Amiri" pitchFamily="2" charset="-78"/>
+                <a:ea typeface="Amiri" pitchFamily="2" charset="-78"/>
                 <a:cs typeface="Amiri" pitchFamily="2" charset="-78"/>
               </a:rPr>
               <a:t>يَوْمٌ فِي حَيَاتِي</a:t>
@@ -5779,6 +5824,7 @@
                   <a:srgbClr val="1B3B6F"/>
                 </a:solidFill>
                 <a:latin typeface="Amiri" pitchFamily="2" charset="-78"/>
+                <a:ea typeface="Amiri" pitchFamily="2" charset="-78"/>
                 <a:cs typeface="Amiri" pitchFamily="2" charset="-78"/>
               </a:rPr>
               <a:t>(أ)</a:t>
@@ -5885,6 +5931,7 @@
                   <a:srgbClr val="1B3B6F"/>
                 </a:solidFill>
                 <a:latin typeface="Amiri" pitchFamily="2" charset="-78"/>
+                <a:ea typeface="Amiri" pitchFamily="2" charset="-78"/>
                 <a:cs typeface="Amiri" pitchFamily="2" charset="-78"/>
               </a:rPr>
               <a:t>صِفْ يَوْمًا دِرَاسِيًّا عَادِيًّا · مَاذَا فَعَلْتَ فِي نِهَايَةِ الأُسْبُوعِ المَاضِي؟ · مَا رَأْيُكَ فِي رُوتِينِكَ؟ · مَاذَا سَتُغَيِّرُ فِي المُسْتَقْبَلِ؟</a:t>
@@ -6016,6 +6063,7 @@
                   <a:srgbClr val="1B3B6F"/>
                 </a:solidFill>
                 <a:latin typeface="Amiri" pitchFamily="2" charset="-78"/>
+                <a:ea typeface="Amiri" pitchFamily="2" charset="-78"/>
                 <a:cs typeface="Amiri" pitchFamily="2" charset="-78"/>
               </a:rPr>
               <a:t>أَيَّامُ الدِّرَاسَةِ وَأَيَّامُ العُطْلَةِ</a:t>
@@ -6054,6 +6102,7 @@
                   <a:srgbClr val="1B3B6F"/>
                 </a:solidFill>
                 <a:latin typeface="Amiri" pitchFamily="2" charset="-78"/>
+                <a:ea typeface="Amiri" pitchFamily="2" charset="-78"/>
                 <a:cs typeface="Amiri" pitchFamily="2" charset="-78"/>
               </a:rPr>
               <a:t>(ب)</a:t>
@@ -6160,6 +6209,7 @@
                   <a:srgbClr val="1B3B6F"/>
                 </a:solidFill>
                 <a:latin typeface="Amiri" pitchFamily="2" charset="-78"/>
+                <a:ea typeface="Amiri" pitchFamily="2" charset="-78"/>
                 <a:cs typeface="Amiri" pitchFamily="2" charset="-78"/>
               </a:rPr>
               <a:t>قَارِنْ بَيْنَ اليَوْمَيْنِ · أَيُّهُمَا تُفَضِّلُ وَلِمَاذَا؟ · صِفْ يَوْمًا قَضَيْتَهُ فِي العُطْلَةِ المَاضِيَةِ · مَاذَا تُرِيدُ أَنْ تُغَيِّرَ؟</a:t>
@@ -6359,6 +6409,7 @@
                   <a:srgbClr val="D4AF37"/>
                 </a:solidFill>
                 <a:latin typeface="Amiri" pitchFamily="2" charset="-78"/>
+                <a:ea typeface="Amiri" pitchFamily="2" charset="-78"/>
                 <a:cs typeface="Amiri" pitchFamily="2" charset="-78"/>
               </a:rPr>
               <a:t>م</a:t>
@@ -6679,6 +6730,7 @@
                   <a:srgbClr val="8A6D1E"/>
                 </a:solidFill>
                 <a:latin typeface="Amiri" pitchFamily="2" charset="-78"/>
+                <a:ea typeface="Amiri" pitchFamily="2" charset="-78"/>
                 <a:cs typeface="Amiri" pitchFamily="2" charset="-78"/>
               </a:rPr>
               <a:t>خُطَّةُ الكِتَابَةِ</a:t>
@@ -7303,6 +7355,7 @@
                   <a:srgbClr val="1B3B6F"/>
                 </a:solidFill>
                 <a:latin typeface="Amiri" pitchFamily="2" charset="-78"/>
+                <a:ea typeface="Amiri" pitchFamily="2" charset="-78"/>
                 <a:cs typeface="Amiri" pitchFamily="2" charset="-78"/>
               </a:rPr>
               <a:t>أَسْتَيْقِظُ فِي السَّادِسَةِ كُلَّ يَوْمٍ.</a:t>
@@ -7402,6 +7455,7 @@
                   <a:srgbClr val="1B3B6F"/>
                 </a:solidFill>
                 <a:latin typeface="Amiri" pitchFamily="2" charset="-78"/>
+                <a:ea typeface="Amiri" pitchFamily="2" charset="-78"/>
                 <a:cs typeface="Amiri" pitchFamily="2" charset="-78"/>
               </a:rPr>
               <a:t>أَمْسِ اسْتَيْقَظْتُ مُتَأَخِّرًا.</a:t>
@@ -7501,6 +7555,7 @@
                   <a:srgbClr val="1B3B6F"/>
                 </a:solidFill>
                 <a:latin typeface="Amiri" pitchFamily="2" charset="-78"/>
+                <a:ea typeface="Amiri" pitchFamily="2" charset="-78"/>
                 <a:cs typeface="Amiri" pitchFamily="2" charset="-78"/>
               </a:rPr>
               <a:t>سَأُحَاوِلُ أَنْ أَنَامَ مُبَكِّرًا.</a:t>
@@ -7662,6 +7717,7 @@
                   <a:srgbClr val="1F2A37"/>
                 </a:solidFill>
                 <a:latin typeface="Amiri" pitchFamily="2" charset="-78"/>
+                <a:ea typeface="Amiri" pitchFamily="2" charset="-78"/>
                 <a:cs typeface="Amiri" pitchFamily="2" charset="-78"/>
               </a:rPr>
               <a:t>أ</a:t>
@@ -7688,6 +7744,7 @@
                   <a:srgbClr val="1F2A37"/>
                 </a:solidFill>
                 <a:latin typeface="Amiri" pitchFamily="2" charset="-78"/>
+                <a:ea typeface="Amiri" pitchFamily="2" charset="-78"/>
                 <a:cs typeface="Amiri" pitchFamily="2" charset="-78"/>
               </a:rPr>
               <a:t>ب</a:t>
@@ -7834,6 +7891,7 @@
                   <a:srgbClr val="D4AF37"/>
                 </a:solidFill>
                 <a:latin typeface="Amiri" pitchFamily="2" charset="-78"/>
+                <a:ea typeface="Amiri" pitchFamily="2" charset="-78"/>
                 <a:cs typeface="Amiri" pitchFamily="2" charset="-78"/>
               </a:rPr>
               <a:t>م</a:t>
@@ -8091,6 +8149,7 @@
                   <a:srgbClr val="8A6D1E"/>
                 </a:solidFill>
                 <a:latin typeface="Amiri" pitchFamily="2" charset="-78"/>
+                <a:ea typeface="Amiri" pitchFamily="2" charset="-78"/>
                 <a:cs typeface="Amiri" pitchFamily="2" charset="-78"/>
               </a:rPr>
               <a:t>أ</a:t>
@@ -8155,6 +8214,7 @@
                   <a:srgbClr val="1B3B6F"/>
                 </a:solidFill>
                 <a:latin typeface="Amiri" pitchFamily="2" charset="-78"/>
+                <a:ea typeface="Amiri" pitchFamily="2" charset="-78"/>
                 <a:cs typeface="Amiri" pitchFamily="2" charset="-78"/>
               </a:rPr>
               <a:t>أ</a:t>
@@ -8206,6 +8266,7 @@
                   <a:srgbClr val="8A6D1E"/>
                 </a:solidFill>
                 <a:latin typeface="Amiri" pitchFamily="2" charset="-78"/>
+                <a:ea typeface="Amiri" pitchFamily="2" charset="-78"/>
                 <a:cs typeface="Amiri" pitchFamily="2" charset="-78"/>
               </a:rPr>
               <a:t>نَمُوذَجُ الإِجَابَةِ</a:t>
@@ -8319,6 +8380,7 @@
                   <a:srgbClr val="1F2A37"/>
                 </a:solidFill>
                 <a:latin typeface="Amiri" pitchFamily="2" charset="-78"/>
+                <a:ea typeface="Amiri" pitchFamily="2" charset="-78"/>
                 <a:cs typeface="Amiri" pitchFamily="2" charset="-78"/>
               </a:rPr>
               <a:t>اسْمِي آدَمُ. أَسْتَيْقِظُ فِي السَّاعَةِ السَّادِسَةِ وَالنِّصْفِ كُلَّ يَوْمٍ. أَوَّلًا أَغْتَسِلُ، ثُمَّ أَرْتَدِي مَلَابِسِي، وَبَعْدَ ذٰلِكَ أَتَنَاوَلُ الإِفْطَارَ. أَتَنَاوَلُ الخُبْزَ وَالجُبْنَ وَأَشْرَبُ الحَلِيبَ. أَذْهَبُ إِلَى المَدْرَسَةِ بِالحَافِلَةِ مَعَ أَخِي، وَتَبْدَأُ الدُّرُوسُ فِي السَّاعَةِ الثَّامِنَةِ. فِي المَدْرَسَةِ أَدْرُسُ الرِّيَاضِيَّاتِ وَالعُلُومَ وَالعَرَبِيَّةَ. أُحِبُّ دَرْسَ العُلُومِ كَثِيرًا. فِي الاسْتِرَاحَةِ أَلْعَبُ مَعَ أَصْدِقَائِي. أَرْجِعُ إِلَى البَيْتِ فِي السَّاعَةِ الثَّالِثَةِ. بَعْدَ المَدْرَسَةِ أَتَنَاوَلُ الغَدَاءَ، ثُمَّ أَدْرُسُ سَاعَةً. فِي المَسَاءِ أَلْعَبُ مَعَ أَخِي وَأُشَاهِدُ التِّلْفَازَ، وَأَنَامُ فِي السَّاعَةِ العَاشِرَةِ.</a:t>
@@ -8338,6 +8400,7 @@
                   <a:srgbClr val="1F2A37"/>
                 </a:solidFill>
                 <a:latin typeface="Amiri" pitchFamily="2" charset="-78"/>
+                <a:ea typeface="Amiri" pitchFamily="2" charset="-78"/>
                 <a:cs typeface="Amiri" pitchFamily="2" charset="-78"/>
               </a:rPr>
               <a:t>فِي نِهَايَةِ الأُسْبُوعِ أَسْتَيْقِظُ مُتَأَخِّرًا وَأَزُورُ جَدِّي وَجَدَّتِي مَعَ أُسْرَتِي.</a:t>
@@ -8357,6 +8420,7 @@
                   <a:srgbClr val="1F2A37"/>
                 </a:solidFill>
                 <a:latin typeface="Amiri" pitchFamily="2" charset="-78"/>
+                <a:ea typeface="Amiri" pitchFamily="2" charset="-78"/>
                 <a:cs typeface="Amiri" pitchFamily="2" charset="-78"/>
               </a:rPr>
               <a:t>أَمْسِ اسْتَيْقَظْتُ مُتَأَخِّرًا، فَذَهَبْتُ إِلَى المَدْرَسَةِ بِالسَّيَّارَةِ مَعَ أَبِي، وَوَصَلْتُ فِي الثَّامِنَةِ وَالرُّبْعِ. كُنْتُ نَاعِسًا طُولَ اليَوْمِ، وَكَانَ يَوْمًا صَعْبًا!</a:t>
@@ -8376,6 +8440,7 @@
                   <a:srgbClr val="1F2A37"/>
                 </a:solidFill>
                 <a:latin typeface="Amiri" pitchFamily="2" charset="-78"/>
+                <a:ea typeface="Amiri" pitchFamily="2" charset="-78"/>
                 <a:cs typeface="Amiri" pitchFamily="2" charset="-78"/>
               </a:rPr>
               <a:t>أُحِبُّ رُوتِينِي لِأَنَّهُ سَهْلٌ وَمُنَظَّمٌ وَمُفِيدٌ، لٰكِنَّنِي نَاعِسٌ فِي الصَّبَاحِ أَحْيَانًا. فِي المُسْتَقْبَلِ سَأَنَامُ مُبَكِّرًا، وَسَأَتَنَاوَلُ إِفْطَارًا صِحِّيًّا، وَسَأُمَارِسُ الرِّيَاضَةَ كُلَّ يَوْمٍ، لِأَنَّ ذٰلِكَ مُهِمٌّ لِصِحَّتِي.</a:t>
@@ -8539,11 +8604,12 @@
               <a:buNone/>
             </a:pPr>
             <a:r>
-              <a:rPr lang="en-US" sz="950" b="1" dirty="0">
+              <a:rPr lang="ar-SA" sz="950" b="1" dirty="0">
                 <a:solidFill>
                   <a:srgbClr val="FFFFFF"/>
                 </a:solidFill>
                 <a:latin typeface="Calibri" pitchFamily="34" charset="0"/>
+                <a:ea typeface="Amiri" pitchFamily="2" charset="-78"/>
                 <a:cs typeface="Amiri" pitchFamily="2" charset="-78"/>
               </a:rPr>
               <a:t>أَوَّلًا … ثُمَّ</a:t>
@@ -8604,11 +8670,12 @@
               <a:buNone/>
             </a:pPr>
             <a:r>
-              <a:rPr lang="en-US" sz="950" b="1" dirty="0">
+              <a:rPr lang="ar-SA" sz="950" b="1" dirty="0">
                 <a:solidFill>
                   <a:srgbClr val="FFFFFF"/>
                 </a:solidFill>
                 <a:latin typeface="Calibri" pitchFamily="34" charset="0"/>
+                <a:ea typeface="Amiri" pitchFamily="2" charset="-78"/>
                 <a:cs typeface="Amiri" pitchFamily="2" charset="-78"/>
               </a:rPr>
               <a:t>أَمْسِ اسْتَيْقَظْتُ</a:t>
@@ -8669,11 +8736,12 @@
               <a:buNone/>
             </a:pPr>
             <a:r>
-              <a:rPr lang="en-US" sz="950" b="1" dirty="0">
+              <a:rPr lang="ar-SA" sz="950" b="1" dirty="0">
                 <a:solidFill>
                   <a:srgbClr val="FFFFFF"/>
                 </a:solidFill>
                 <a:latin typeface="Calibri" pitchFamily="34" charset="0"/>
+                <a:ea typeface="Amiri" pitchFamily="2" charset="-78"/>
                 <a:cs typeface="Amiri" pitchFamily="2" charset="-78"/>
               </a:rPr>
               <a:t>لِأَنَّهُ … لٰكِنَّنِي</a:t>
@@ -8734,11 +8802,12 @@
               <a:buNone/>
             </a:pPr>
             <a:r>
-              <a:rPr lang="en-US" sz="950" b="1" dirty="0">
+              <a:rPr lang="ar-SA" sz="950" b="1" dirty="0">
                 <a:solidFill>
                   <a:srgbClr val="FFFFFF"/>
                 </a:solidFill>
                 <a:latin typeface="Calibri" pitchFamily="34" charset="0"/>
+                <a:ea typeface="Amiri" pitchFamily="2" charset="-78"/>
                 <a:cs typeface="Amiri" pitchFamily="2" charset="-78"/>
               </a:rPr>
               <a:t>سَأَنَامُ</a:t>
@@ -8872,6 +8941,7 @@
                   <a:srgbClr val="D4AF37"/>
                 </a:solidFill>
                 <a:latin typeface="Amiri" pitchFamily="2" charset="-78"/>
+                <a:ea typeface="Amiri" pitchFamily="2" charset="-78"/>
                 <a:cs typeface="Amiri" pitchFamily="2" charset="-78"/>
               </a:rPr>
               <a:t>م</a:t>
@@ -9129,6 +9199,7 @@
                   <a:srgbClr val="8A6D1E"/>
                 </a:solidFill>
                 <a:latin typeface="Amiri" pitchFamily="2" charset="-78"/>
+                <a:ea typeface="Amiri" pitchFamily="2" charset="-78"/>
                 <a:cs typeface="Amiri" pitchFamily="2" charset="-78"/>
               </a:rPr>
               <a:t>أ</a:t>
@@ -9193,6 +9264,7 @@
                   <a:srgbClr val="1B3B6F"/>
                 </a:solidFill>
                 <a:latin typeface="Amiri" pitchFamily="2" charset="-78"/>
+                <a:ea typeface="Amiri" pitchFamily="2" charset="-78"/>
                 <a:cs typeface="Amiri" pitchFamily="2" charset="-78"/>
               </a:rPr>
               <a:t>أ</a:t>
@@ -9244,6 +9316,7 @@
                   <a:srgbClr val="8A6D1E"/>
                 </a:solidFill>
                 <a:latin typeface="Amiri" pitchFamily="2" charset="-78"/>
+                <a:ea typeface="Amiri" pitchFamily="2" charset="-78"/>
                 <a:cs typeface="Amiri" pitchFamily="2" charset="-78"/>
               </a:rPr>
               <a:t>نَمُوذَجُ الإِجَابَةِ</a:t>
@@ -9357,6 +9430,7 @@
                   <a:srgbClr val="1F2A37"/>
                 </a:solidFill>
                 <a:latin typeface="Amiri" pitchFamily="2" charset="-78"/>
+                <a:ea typeface="Amiri" pitchFamily="2" charset="-78"/>
                 <a:cs typeface="Amiri" pitchFamily="2" charset="-78"/>
               </a:rPr>
               <a:t>أَسْتَيْقِظُ فِي أَيَّامِ الدِّرَاسَةِ فِي السَّاعَةِ السَّادِسَةِ، وَبَعْدَ أَنْ أَغْتَسِلَ وَأُصَلِّيَ الفَجْرَ أَتَنَاوَلُ الإِفْطَارَ مَعَ أُسْرَتِي. ثُمَّ أَسْتَقِلُّ الحَافِلَةَ إِلَى المَدْرَسَةِ، حَيْثُ تَبْدَأُ الدُّرُوسُ فِي الثَّامِنَةِ. بَعْدَ الظُّهْرِ أَرْجِعُ إِلَى البَيْتِ مُتْعَبًا، فَأَرْتَاحُ قَلِيلًا بَعْدَ يَوْمٍ طَوِيلٍ ثُمَّ أُنْهِي وَاجِبَاتِي. وَفِي المَسَاءِ أَقْضِي سَاعَةً مَعَ أُسْرَتِي، ثُمَّ أَقْرَأُ قَلِيلًا قَبْلَ النَّوْمِ.</a:t>
@@ -9376,6 +9450,7 @@
                   <a:srgbClr val="1F2A37"/>
                 </a:solidFill>
                 <a:latin typeface="Amiri" pitchFamily="2" charset="-78"/>
+                <a:ea typeface="Amiri" pitchFamily="2" charset="-78"/>
                 <a:cs typeface="Amiri" pitchFamily="2" charset="-78"/>
               </a:rPr>
               <a:t>فِي نِهَايَةِ الأُسْبُوعِ المَاضِي اسْتَيْقَظْتُ مُتَأَخِّرًا، وَذَهَبْتُ مَعَ أَبِي إِلَى السُّوقِ، ثُمَّ زُرْنَا جَدَّتِي وَتَنَاوَلْنَا الغَدَاءَ عِنْدَهَا، لِأَنَّهَا تَطْبُخُ أَطْيَبَ طَعَامٍ. وَفِي المَسَاءِ شَاهَدْنَا فِيلْمًا مَعًا. كَانَ يَوْمًا هَادِئًا وَمُمْتِعًا.</a:t>
@@ -9395,6 +9470,7 @@
                   <a:srgbClr val="1F2A37"/>
                 </a:solidFill>
                 <a:latin typeface="Amiri" pitchFamily="2" charset="-78"/>
+                <a:ea typeface="Amiri" pitchFamily="2" charset="-78"/>
                 <a:cs typeface="Amiri" pitchFamily="2" charset="-78"/>
               </a:rPr>
               <a:t>فِي رَأْيِي الرُّوتِينُ المُنَظَّمُ مُهِمٌّ جِدًّا، لِأَنَّهُ يُسَاعِدُنَا عَلَى النَّجَاحِ، وَيُعَلِّمُنَا تَنْظِيمَ الوَقْتِ، وَيُقَلِّلُ التَّوَتُّرَ. صَحِيحٌ أَنَّنِي أُحِبُّ رُوتِينِي، غَيْرَ أَنَّنِي أَنَامُ مُتَأَخِّرًا أَحْيَانًا بِسَبَبِ الهَاتِفِ، فَأَكُونُ نَاعِسًا فِي الصَّبَاحِ.</a:t>
@@ -9414,6 +9490,7 @@
                   <a:srgbClr val="1F2A37"/>
                 </a:solidFill>
                 <a:latin typeface="Amiri" pitchFamily="2" charset="-78"/>
+                <a:ea typeface="Amiri" pitchFamily="2" charset="-78"/>
                 <a:cs typeface="Amiri" pitchFamily="2" charset="-78"/>
               </a:rPr>
               <a:t>فِي السَّنَةِ القَادِمَةِ سَأُحَاوِلُ أَنْ أَنَامَ مُبَكِّرًا، وَسَأُمَارِسُ الرِّيَاضَةَ فِي الصَّبَاحِ لِأَكُونَ نَشِيطًا طُولَ اليَوْمِ. وَلَوْ نَجَحْتُ فِي ذٰلِكَ، لَتَحَسَّنَتْ دَرَجَاتِي أَيْضًا. وَأَنْتُمْ، كَيْفَ تُنَظِّمُونَ يَوْمَكُمْ؟</a:t>
@@ -9577,11 +9654,12 @@
               <a:buNone/>
             </a:pPr>
             <a:r>
-              <a:rPr lang="en-US" sz="950" b="1" dirty="0">
+              <a:rPr lang="ar-SA" sz="950" b="1" dirty="0">
                 <a:solidFill>
                   <a:srgbClr val="FFFFFF"/>
                 </a:solidFill>
                 <a:latin typeface="Calibri" pitchFamily="34" charset="0"/>
+                <a:ea typeface="Amiri" pitchFamily="2" charset="-78"/>
                 <a:cs typeface="Amiri" pitchFamily="2" charset="-78"/>
               </a:rPr>
               <a:t>بَعْدَ أَنْ أَغْتَسِلَ</a:t>
@@ -9642,11 +9720,12 @@
               <a:buNone/>
             </a:pPr>
             <a:r>
-              <a:rPr lang="en-US" sz="950" b="1" dirty="0">
+              <a:rPr lang="ar-SA" sz="950" b="1" dirty="0">
                 <a:solidFill>
                   <a:srgbClr val="FFFFFF"/>
                 </a:solidFill>
                 <a:latin typeface="Calibri" pitchFamily="34" charset="0"/>
+                <a:ea typeface="Amiri" pitchFamily="2" charset="-78"/>
                 <a:cs typeface="Amiri" pitchFamily="2" charset="-78"/>
               </a:rPr>
               <a:t>صَحِيحٌ أَنَّ … غَيْرَ أَنَّ</a:t>
@@ -9707,11 +9786,12 @@
               <a:buNone/>
             </a:pPr>
             <a:r>
-              <a:rPr lang="en-US" sz="950" b="1" dirty="0">
+              <a:rPr lang="ar-SA" sz="950" b="1" dirty="0">
                 <a:solidFill>
                   <a:srgbClr val="FFFFFF"/>
                 </a:solidFill>
                 <a:latin typeface="Calibri" pitchFamily="34" charset="0"/>
+                <a:ea typeface="Amiri" pitchFamily="2" charset="-78"/>
                 <a:cs typeface="Amiri" pitchFamily="2" charset="-78"/>
               </a:rPr>
               <a:t>لِأَكُونَ نَشِيطًا</a:t>
@@ -9772,11 +9852,12 @@
               <a:buNone/>
             </a:pPr>
             <a:r>
-              <a:rPr lang="en-US" sz="950" b="1" dirty="0">
+              <a:rPr lang="ar-SA" sz="950" b="1" dirty="0">
                 <a:solidFill>
                   <a:srgbClr val="FFFFFF"/>
                 </a:solidFill>
                 <a:latin typeface="Calibri" pitchFamily="34" charset="0"/>
+                <a:ea typeface="Amiri" pitchFamily="2" charset="-78"/>
                 <a:cs typeface="Amiri" pitchFamily="2" charset="-78"/>
               </a:rPr>
               <a:t>لَوْ … لَتَحَسَّنَتْ</a:t>
@@ -9910,6 +9991,7 @@
                   <a:srgbClr val="D4AF37"/>
                 </a:solidFill>
                 <a:latin typeface="Amiri" pitchFamily="2" charset="-78"/>
+                <a:ea typeface="Amiri" pitchFamily="2" charset="-78"/>
                 <a:cs typeface="Amiri" pitchFamily="2" charset="-78"/>
               </a:rPr>
               <a:t>م</a:t>
@@ -10167,6 +10249,7 @@
                   <a:srgbClr val="8A6D1E"/>
                 </a:solidFill>
                 <a:latin typeface="Amiri" pitchFamily="2" charset="-78"/>
+                <a:ea typeface="Amiri" pitchFamily="2" charset="-78"/>
                 <a:cs typeface="Amiri" pitchFamily="2" charset="-78"/>
               </a:rPr>
               <a:t>ب</a:t>
@@ -10231,6 +10314,7 @@
                   <a:srgbClr val="1B3B6F"/>
                 </a:solidFill>
                 <a:latin typeface="Amiri" pitchFamily="2" charset="-78"/>
+                <a:ea typeface="Amiri" pitchFamily="2" charset="-78"/>
                 <a:cs typeface="Amiri" pitchFamily="2" charset="-78"/>
               </a:rPr>
               <a:t>ب</a:t>
@@ -10282,6 +10366,7 @@
                   <a:srgbClr val="8A6D1E"/>
                 </a:solidFill>
                 <a:latin typeface="Amiri" pitchFamily="2" charset="-78"/>
+                <a:ea typeface="Amiri" pitchFamily="2" charset="-78"/>
                 <a:cs typeface="Amiri" pitchFamily="2" charset="-78"/>
               </a:rPr>
               <a:t>نَمُوذَجُ الإِجَابَةِ</a:t>
@@ -10395,6 +10480,7 @@
                   <a:srgbClr val="1F2A37"/>
                 </a:solidFill>
                 <a:latin typeface="Amiri" pitchFamily="2" charset="-78"/>
+                <a:ea typeface="Amiri" pitchFamily="2" charset="-78"/>
                 <a:cs typeface="Amiri" pitchFamily="2" charset="-78"/>
               </a:rPr>
               <a:t>فِي أَيَّامِ الدِّرَاسَةِ يَكُونُ يَوْمِي سَرِيعًا وَمُنَظَّمًا جِدًّا. أَسْتَيْقِظُ فِي السَّادِسَةِ، وَأَخْرُجُ مِنَ البَيْتِ فِي السَّابِعَةِ وَالنِّصْفِ، وَلَا أَرْجِعُ إِلَّا فِي الرَّابِعَةِ. وَبَعْدَ ذٰلِكَ أُنْهِي وَاجِبَاتِي، فَلَا يَبْقَى عِنْدِي وَقْتٌ كَثِيرٌ لِلرَّاحَةِ. أَمَّا فِي العُطْلَةِ فَأَسْتَيْقِظُ مُتَأَخِّرًا، وَأَقْضِي وَقْتًا أَطْوَلَ مَعَ أُسْرَتِي وَصَدِيقَاتِي، وَأَسْهَرُ قَلِيلًا مَعَهُمْ فِي المَسَاءِ.</a:t>
@@ -10414,6 +10500,7 @@
                   <a:srgbClr val="1F2A37"/>
                 </a:solidFill>
                 <a:latin typeface="Amiri" pitchFamily="2" charset="-78"/>
+                <a:ea typeface="Amiri" pitchFamily="2" charset="-78"/>
                 <a:cs typeface="Amiri" pitchFamily="2" charset="-78"/>
               </a:rPr>
               <a:t>أُفَضِّلُ أَيَّامَ العُطْلَةِ لِأَنَّنِي أَرْتَاحُ فِيهَا وَأُمَارِسُ هِوَايَاتِي مِثْلَ الرَّسْمِ وَالقِرَاءَةِ، غَيْرَ أَنَّنِي أَعْرِفُ أَنَّ أَيَّامَ الدِّرَاسَةِ تُعَلِّمُنِي النِّظَامَ وَالمَسْؤُولِيَّةَ.</a:t>
@@ -10433,6 +10520,7 @@
                   <a:srgbClr val="1F2A37"/>
                 </a:solidFill>
                 <a:latin typeface="Amiri" pitchFamily="2" charset="-78"/>
+                <a:ea typeface="Amiri" pitchFamily="2" charset="-78"/>
                 <a:cs typeface="Amiri" pitchFamily="2" charset="-78"/>
               </a:rPr>
               <a:t>فِي العُطْلَةِ المَاضِيَةِ قَضَيْتُ يَوْمًا رَائِعًا عَلَى الشَّاطِئِ؛ سَبَحْتُ فِي البَحْرِ، وَالْتَقَطْتُ صُوَرًا جَمِيلَةً، وَتَنَاوَلْنَا السَّمَكَ فِي مَطْعَمٍ صَغِيرٍ، ثُمَّ رَجَعْنَا إِلَى البَيْتِ فِي المَسَاءِ مُتْعَبِينَ وَسُعَدَاءَ. كَانَ الطَّقْسُ جَمِيلًا جِدًّا، وَكَانَ البَحْرُ هَادِئًا.</a:t>
@@ -10452,6 +10540,7 @@
                   <a:srgbClr val="1F2A37"/>
                 </a:solidFill>
                 <a:latin typeface="Amiri" pitchFamily="2" charset="-78"/>
+                <a:ea typeface="Amiri" pitchFamily="2" charset="-78"/>
                 <a:cs typeface="Amiri" pitchFamily="2" charset="-78"/>
               </a:rPr>
               <a:t>لَوْ كَانَ الأَمْرُ بِيَدِي، لَبَدَأَ اليَوْمُ الدِّرَاسِيُّ فِي التَّاسِعَةِ، لِأَنَّ الطُّلَّابَ يَكُونُونَ أَكْثَرَ نَشَاطًا عِنْدَمَا يَنَامُونَ جَيِّدًا، وَلَكَانَتْ نَتَائِجُهُمْ أَفْضَلَ. وَفِي المُسْتَقْبَلِ سَأُنَظِّمُ وَقْتِي فِي العُطْلَةِ أَيْضًا، لِكَيْ أَقْرَأَ أَكْثَرَ وَأَسْتَعِدَّ لِلسَّنَةِ الجَدِيدَةِ. وَأَنْتُمْ، مَاذَا تُفَضِّلُونَ؟</a:t>
@@ -10615,11 +10704,12 @@
               <a:buNone/>
             </a:pPr>
             <a:r>
-              <a:rPr lang="en-US" sz="950" b="1" dirty="0">
+              <a:rPr lang="ar-SA" sz="950" b="1" dirty="0">
                 <a:solidFill>
                   <a:srgbClr val="FFFFFF"/>
                 </a:solidFill>
                 <a:latin typeface="Calibri" pitchFamily="34" charset="0"/>
+                <a:ea typeface="Amiri" pitchFamily="2" charset="-78"/>
                 <a:cs typeface="Amiri" pitchFamily="2" charset="-78"/>
               </a:rPr>
               <a:t>أَمَّا فِي العُطْلَةِ فَأَسْتَيْقِظُ</a:t>
@@ -10680,11 +10770,12 @@
               <a:buNone/>
             </a:pPr>
             <a:r>
-              <a:rPr lang="en-US" sz="950" b="1" dirty="0">
+              <a:rPr lang="ar-SA" sz="950" b="1" dirty="0">
                 <a:solidFill>
                   <a:srgbClr val="FFFFFF"/>
                 </a:solidFill>
                 <a:latin typeface="Calibri" pitchFamily="34" charset="0"/>
+                <a:ea typeface="Amiri" pitchFamily="2" charset="-78"/>
                 <a:cs typeface="Amiri" pitchFamily="2" charset="-78"/>
               </a:rPr>
               <a:t>غَيْرَ أَنَّنِي</a:t>
@@ -10745,11 +10836,12 @@
               <a:buNone/>
             </a:pPr>
             <a:r>
-              <a:rPr lang="en-US" sz="950" b="1" dirty="0">
+              <a:rPr lang="ar-SA" sz="950" b="1" dirty="0">
                 <a:solidFill>
                   <a:srgbClr val="FFFFFF"/>
                 </a:solidFill>
                 <a:latin typeface="Calibri" pitchFamily="34" charset="0"/>
+                <a:ea typeface="Amiri" pitchFamily="2" charset="-78"/>
                 <a:cs typeface="Amiri" pitchFamily="2" charset="-78"/>
               </a:rPr>
               <a:t>لَوْ كَانَ … لَبَدَأَ</a:t>
@@ -10810,11 +10902,12 @@
               <a:buNone/>
             </a:pPr>
             <a:r>
-              <a:rPr lang="en-US" sz="950" b="1" dirty="0">
+              <a:rPr lang="ar-SA" sz="950" b="1" dirty="0">
                 <a:solidFill>
                   <a:srgbClr val="FFFFFF"/>
                 </a:solidFill>
                 <a:latin typeface="Calibri" pitchFamily="34" charset="0"/>
+                <a:ea typeface="Amiri" pitchFamily="2" charset="-78"/>
                 <a:cs typeface="Amiri" pitchFamily="2" charset="-78"/>
               </a:rPr>
               <a:t>لِكَيْ أَقْرَأَ</a:t>
@@ -10948,6 +11041,7 @@
                   <a:srgbClr val="D4AF37"/>
                 </a:solidFill>
                 <a:latin typeface="Amiri" pitchFamily="2" charset="-78"/>
+                <a:ea typeface="Amiri" pitchFamily="2" charset="-78"/>
                 <a:cs typeface="Amiri" pitchFamily="2" charset="-78"/>
               </a:rPr>
               <a:t>م</a:t>
@@ -11268,6 +11362,7 @@
                   <a:srgbClr val="8A6D1E"/>
                 </a:solidFill>
                 <a:latin typeface="Amiri" pitchFamily="2" charset="-78"/>
+                <a:ea typeface="Amiri" pitchFamily="2" charset="-78"/>
                 <a:cs typeface="Amiri" pitchFamily="2" charset="-78"/>
               </a:rPr>
               <a:t>قَيِّمْ عَمَلَكَ</a:t>
@@ -12512,6 +12607,7 @@
                   <a:srgbClr val="FFFFFF"/>
                 </a:solidFill>
                 <a:latin typeface="Amiri" pitchFamily="2" charset="-78"/>
+                <a:ea typeface="Amiri" pitchFamily="2" charset="-78"/>
                 <a:cs typeface="Amiri" pitchFamily="2" charset="-78"/>
               </a:rPr>
               <a:t>أَحْسَنْتُمْ! إِلَى اللِّقَاءِ</a:t>
@@ -12664,6 +12760,7 @@
                   <a:srgbClr val="D4AF37"/>
                 </a:solidFill>
                 <a:latin typeface="Amiri" pitchFamily="2" charset="-78"/>
+                <a:ea typeface="Amiri" pitchFamily="2" charset="-78"/>
                 <a:cs typeface="Amiri" pitchFamily="2" charset="-78"/>
               </a:rPr>
               <a:t>وَرْشَةُ التَّدْرِيبِ</a:t>
@@ -12797,6 +12894,7 @@
                   <a:srgbClr val="D4AF37"/>
                 </a:solidFill>
                 <a:latin typeface="Amiri" pitchFamily="2" charset="-78"/>
+                <a:ea typeface="Amiri" pitchFamily="2" charset="-78"/>
                 <a:cs typeface="Amiri" pitchFamily="2" charset="-78"/>
               </a:rPr>
               <a:t>م</a:t>
@@ -13117,6 +13215,7 @@
                   <a:srgbClr val="8A6D1E"/>
                 </a:solidFill>
                 <a:latin typeface="Amiri" pitchFamily="2" charset="-78"/>
+                <a:ea typeface="Amiri" pitchFamily="2" charset="-78"/>
                 <a:cs typeface="Amiri" pitchFamily="2" charset="-78"/>
               </a:rPr>
               <a:t>آدَابُ الصَّفِّ</a:t>
@@ -14648,6 +14747,7 @@
                   <a:srgbClr val="D4AF37"/>
                 </a:solidFill>
                 <a:latin typeface="Amiri" pitchFamily="2" charset="-78"/>
+                <a:ea typeface="Amiri" pitchFamily="2" charset="-78"/>
                 <a:cs typeface="Amiri" pitchFamily="2" charset="-78"/>
               </a:rPr>
               <a:t>م</a:t>
@@ -14968,6 +15068,7 @@
                   <a:srgbClr val="8A6D1E"/>
                 </a:solidFill>
                 <a:latin typeface="Amiri" pitchFamily="2" charset="-78"/>
+                <a:ea typeface="Amiri" pitchFamily="2" charset="-78"/>
                 <a:cs typeface="Amiri" pitchFamily="2" charset="-78"/>
               </a:rPr>
               <a:t>خَرِيطَةُ الوَرْشَةِ</a:t>
@@ -15282,6 +15383,7 @@
                   <a:srgbClr val="1B3B6F"/>
                 </a:solidFill>
                 <a:latin typeface="Amiri" pitchFamily="2" charset="-78"/>
+                <a:ea typeface="Amiri" pitchFamily="2" charset="-78"/>
                 <a:cs typeface="Amiri" pitchFamily="2" charset="-78"/>
               </a:rPr>
               <a:t>كَيْفَ</a:t>
@@ -15558,6 +15660,7 @@
                   <a:srgbClr val="1E6B52"/>
                 </a:solidFill>
                 <a:latin typeface="Amiri" pitchFamily="2" charset="-78"/>
+                <a:ea typeface="Amiri" pitchFamily="2" charset="-78"/>
                 <a:cs typeface="Amiri" pitchFamily="2" charset="-78"/>
               </a:rPr>
               <a:t>الاسْتِمَارَةُ</a:t>
@@ -15834,6 +15937,7 @@
                   <a:srgbClr val="1E6B52"/>
                 </a:solidFill>
                 <a:latin typeface="Amiri" pitchFamily="2" charset="-78"/>
+                <a:ea typeface="Amiri" pitchFamily="2" charset="-78"/>
                 <a:cs typeface="Amiri" pitchFamily="2" charset="-78"/>
               </a:rPr>
               <a:t>الرِّسَالَةُ</a:t>
@@ -16110,6 +16214,7 @@
                   <a:srgbClr val="1E6B52"/>
                 </a:solidFill>
                 <a:latin typeface="Amiri" pitchFamily="2" charset="-78"/>
+                <a:ea typeface="Amiri" pitchFamily="2" charset="-78"/>
                 <a:cs typeface="Amiri" pitchFamily="2" charset="-78"/>
               </a:rPr>
               <a:t>المَقَالُ</a:t>
@@ -16386,6 +16491,7 @@
                   <a:srgbClr val="8A6D1E"/>
                 </a:solidFill>
                 <a:latin typeface="Amiri" pitchFamily="2" charset="-78"/>
+                <a:ea typeface="Amiri" pitchFamily="2" charset="-78"/>
                 <a:cs typeface="Amiri" pitchFamily="2" charset="-78"/>
               </a:rPr>
               <a:t>قَيِّمْ</a:t>
@@ -16629,6 +16735,7 @@
                   <a:srgbClr val="D4AF37"/>
                 </a:solidFill>
                 <a:latin typeface="Amiri" pitchFamily="2" charset="-78"/>
+                <a:ea typeface="Amiri" pitchFamily="2" charset="-78"/>
                 <a:cs typeface="Amiri" pitchFamily="2" charset="-78"/>
               </a:rPr>
               <a:t>م</a:t>
@@ -16949,6 +17056,7 @@
                   <a:srgbClr val="8A6D1E"/>
                 </a:solidFill>
                 <a:latin typeface="Amiri" pitchFamily="2" charset="-78"/>
+                <a:ea typeface="Amiri" pitchFamily="2" charset="-78"/>
                 <a:cs typeface="Amiri" pitchFamily="2" charset="-78"/>
               </a:rPr>
               <a:t>امْتِحَانُ الكِتَابَةِ</a:t>
@@ -17476,6 +17584,7 @@
                   <a:srgbClr val="1F2A37"/>
                 </a:solidFill>
                 <a:latin typeface="Amiri" pitchFamily="2" charset="-78"/>
+                <a:ea typeface="Amiri" pitchFamily="2" charset="-78"/>
                 <a:cs typeface="Amiri" pitchFamily="2" charset="-78"/>
               </a:rPr>
               <a:t>أَـ</a:t>
@@ -17599,6 +17708,7 @@
                   <a:srgbClr val="1B3B6F"/>
                 </a:solidFill>
                 <a:latin typeface="Amiri" pitchFamily="2" charset="-78"/>
+                <a:ea typeface="Amiri" pitchFamily="2" charset="-78"/>
                 <a:cs typeface="Amiri" pitchFamily="2" charset="-78"/>
               </a:rPr>
               <a:t>أَوَّلًا · ثُمَّ · بَعْدَ ذٰلِكَ · أَخِيرًا</a:t>
@@ -17698,6 +17808,7 @@
                   <a:srgbClr val="1B3B6F"/>
                 </a:solidFill>
                 <a:latin typeface="Amiri" pitchFamily="2" charset="-78"/>
+                <a:ea typeface="Amiri" pitchFamily="2" charset="-78"/>
                 <a:cs typeface="Amiri" pitchFamily="2" charset="-78"/>
               </a:rPr>
               <a:t>فِي رَأْيِي … لِأَنَّ …</a:t>
@@ -17797,6 +17908,7 @@
                   <a:srgbClr val="1B3B6F"/>
                 </a:solidFill>
                 <a:latin typeface="Amiri" pitchFamily="2" charset="-78"/>
+                <a:ea typeface="Amiri" pitchFamily="2" charset="-78"/>
                 <a:cs typeface="Amiri" pitchFamily="2" charset="-78"/>
               </a:rPr>
               <a:t>أَمْسِ … · سَـ / سَوْفَ …</a:t>
@@ -17968,6 +18080,7 @@
                   <a:srgbClr val="D4AF37"/>
                 </a:solidFill>
                 <a:latin typeface="Amiri" pitchFamily="2" charset="-78"/>
+                <a:ea typeface="Amiri" pitchFamily="2" charset="-78"/>
                 <a:cs typeface="Amiri" pitchFamily="2" charset="-78"/>
               </a:rPr>
               <a:t>م</a:t>
@@ -18288,6 +18401,7 @@
                   <a:srgbClr val="8A6D1E"/>
                 </a:solidFill>
                 <a:latin typeface="Amiri" pitchFamily="2" charset="-78"/>
+                <a:ea typeface="Amiri" pitchFamily="2" charset="-78"/>
                 <a:cs typeface="Amiri" pitchFamily="2" charset="-78"/>
               </a:rPr>
               <a:t>اسْتِمَارَةُ التَّسْجِيلِ فِي المُخَيَّمِ</a:t>
@@ -18644,6 +18758,7 @@
                   <a:srgbClr val="1B3B6F"/>
                 </a:solidFill>
                 <a:latin typeface="Amiri" pitchFamily="2" charset="-78"/>
+                <a:ea typeface="Amiri" pitchFamily="2" charset="-78"/>
                 <a:cs typeface="Amiri" pitchFamily="2" charset="-78"/>
               </a:rPr>
               <a:t>الاسْمُ الكَامِلُ</a:t>
@@ -18888,6 +19003,7 @@
                   <a:srgbClr val="1B3B6F"/>
                 </a:solidFill>
                 <a:latin typeface="Amiri" pitchFamily="2" charset="-78"/>
+                <a:ea typeface="Amiri" pitchFamily="2" charset="-78"/>
                 <a:cs typeface="Amiri" pitchFamily="2" charset="-78"/>
               </a:rPr>
               <a:t>العُمْرُ</a:t>
@@ -19132,6 +19248,7 @@
                   <a:srgbClr val="1B3B6F"/>
                 </a:solidFill>
                 <a:latin typeface="Amiri" pitchFamily="2" charset="-78"/>
+                <a:ea typeface="Amiri" pitchFamily="2" charset="-78"/>
                 <a:cs typeface="Amiri" pitchFamily="2" charset="-78"/>
               </a:rPr>
               <a:t>الجِنْسِيَّةُ</a:t>
@@ -19376,6 +19493,7 @@
                   <a:srgbClr val="1B3B6F"/>
                 </a:solidFill>
                 <a:latin typeface="Amiri" pitchFamily="2" charset="-78"/>
+                <a:ea typeface="Amiri" pitchFamily="2" charset="-78"/>
                 <a:cs typeface="Amiri" pitchFamily="2" charset="-78"/>
               </a:rPr>
               <a:t>مَوْعِدُ الاسْتِيقَاظِ عَادَةً</a:t>
@@ -19620,6 +19738,7 @@
                   <a:srgbClr val="1B3B6F"/>
                 </a:solidFill>
                 <a:latin typeface="Amiri" pitchFamily="2" charset="-78"/>
+                <a:ea typeface="Amiri" pitchFamily="2" charset="-78"/>
                 <a:cs typeface="Amiri" pitchFamily="2" charset="-78"/>
               </a:rPr>
               <a:t>الإِفْطَارُ المُفَضَّلُ</a:t>
@@ -19864,6 +19983,7 @@
                   <a:srgbClr val="1B3B6F"/>
                 </a:solidFill>
                 <a:latin typeface="Amiri" pitchFamily="2" charset="-78"/>
+                <a:ea typeface="Amiri" pitchFamily="2" charset="-78"/>
                 <a:cs typeface="Amiri" pitchFamily="2" charset="-78"/>
               </a:rPr>
               <a:t>كَيْفَ تَذْهَبُ إِلَى المَدْرَسَةِ؟</a:t>
@@ -20108,6 +20228,7 @@
                   <a:srgbClr val="1B3B6F"/>
                 </a:solidFill>
                 <a:latin typeface="Amiri" pitchFamily="2" charset="-78"/>
+                <a:ea typeface="Amiri" pitchFamily="2" charset="-78"/>
                 <a:cs typeface="Amiri" pitchFamily="2" charset="-78"/>
               </a:rPr>
               <a:t>نَشَاطٌ تُمَارِسُهُ بَعْدَ المَدْرَسَةِ</a:t>
@@ -20287,6 +20408,7 @@
                   <a:srgbClr val="1B3B6F"/>
                 </a:solidFill>
                 <a:latin typeface="Amiri" pitchFamily="2" charset="-78"/>
+                <a:ea typeface="Amiri" pitchFamily="2" charset="-78"/>
                 <a:cs typeface="Amiri" pitchFamily="2" charset="-78"/>
               </a:rPr>
               <a:t>جُمْلَةٌ عَنْ يَوْمِكَ المُفَضَّلِ وَلِمَاذَا</a:t>
@@ -20496,6 +20618,7 @@
                   <a:srgbClr val="D4AF37"/>
                 </a:solidFill>
                 <a:latin typeface="Amiri" pitchFamily="2" charset="-78"/>
+                <a:ea typeface="Amiri" pitchFamily="2" charset="-78"/>
                 <a:cs typeface="Amiri" pitchFamily="2" charset="-78"/>
               </a:rPr>
               <a:t>م</a:t>
@@ -20816,6 +20939,7 @@
                   <a:srgbClr val="8A6D1E"/>
                 </a:solidFill>
                 <a:latin typeface="Amiri" pitchFamily="2" charset="-78"/>
+                <a:ea typeface="Amiri" pitchFamily="2" charset="-78"/>
                 <a:cs typeface="Amiri" pitchFamily="2" charset="-78"/>
               </a:rPr>
               <a:t>نَمُوذَجُ الإِجَابَةِ</a:t>
@@ -21134,6 +21258,7 @@
                   <a:srgbClr val="1B3B6F"/>
                 </a:solidFill>
                 <a:latin typeface="Amiri" pitchFamily="2" charset="-78"/>
+                <a:ea typeface="Amiri" pitchFamily="2" charset="-78"/>
                 <a:cs typeface="Amiri" pitchFamily="2" charset="-78"/>
               </a:rPr>
               <a:t>سَارَةُ أَحْمَدُ</a:t>
@@ -21172,6 +21297,7 @@
                   <a:srgbClr val="1B3B6F"/>
                 </a:solidFill>
                 <a:latin typeface="Amiri" pitchFamily="2" charset="-78"/>
+                <a:ea typeface="Amiri" pitchFamily="2" charset="-78"/>
                 <a:cs typeface="Amiri" pitchFamily="2" charset="-78"/>
               </a:rPr>
               <a:t>الاسْمُ الكَامِلُ</a:t>
@@ -21313,6 +21439,7 @@
                   <a:srgbClr val="1B3B6F"/>
                 </a:solidFill>
                 <a:latin typeface="Amiri" pitchFamily="2" charset="-78"/>
+                <a:ea typeface="Amiri" pitchFamily="2" charset="-78"/>
                 <a:cs typeface="Amiri" pitchFamily="2" charset="-78"/>
               </a:rPr>
               <a:t>خَمْسَ عَشْرَةَ سَنَةً</a:t>
@@ -21351,6 +21478,7 @@
                   <a:srgbClr val="1B3B6F"/>
                 </a:solidFill>
                 <a:latin typeface="Amiri" pitchFamily="2" charset="-78"/>
+                <a:ea typeface="Amiri" pitchFamily="2" charset="-78"/>
                 <a:cs typeface="Amiri" pitchFamily="2" charset="-78"/>
               </a:rPr>
               <a:t>العُمْرُ</a:t>
@@ -21492,6 +21620,7 @@
                   <a:srgbClr val="1B3B6F"/>
                 </a:solidFill>
                 <a:latin typeface="Amiri" pitchFamily="2" charset="-78"/>
+                <a:ea typeface="Amiri" pitchFamily="2" charset="-78"/>
                 <a:cs typeface="Amiri" pitchFamily="2" charset="-78"/>
               </a:rPr>
               <a:t>بِرِيطَانِيَّةٌ</a:t>
@@ -21530,6 +21659,7 @@
                   <a:srgbClr val="1B3B6F"/>
                 </a:solidFill>
                 <a:latin typeface="Amiri" pitchFamily="2" charset="-78"/>
+                <a:ea typeface="Amiri" pitchFamily="2" charset="-78"/>
                 <a:cs typeface="Amiri" pitchFamily="2" charset="-78"/>
               </a:rPr>
               <a:t>الجِنْسِيَّةُ</a:t>
@@ -21671,6 +21801,7 @@
                   <a:srgbClr val="1B3B6F"/>
                 </a:solidFill>
                 <a:latin typeface="Amiri" pitchFamily="2" charset="-78"/>
+                <a:ea typeface="Amiri" pitchFamily="2" charset="-78"/>
                 <a:cs typeface="Amiri" pitchFamily="2" charset="-78"/>
               </a:rPr>
               <a:t>السَّاعَةُ السَّادِسَةُ وَالنِّصْفُ</a:t>
@@ -21709,6 +21840,7 @@
                   <a:srgbClr val="1B3B6F"/>
                 </a:solidFill>
                 <a:latin typeface="Amiri" pitchFamily="2" charset="-78"/>
+                <a:ea typeface="Amiri" pitchFamily="2" charset="-78"/>
                 <a:cs typeface="Amiri" pitchFamily="2" charset="-78"/>
               </a:rPr>
               <a:t>مَوْعِدُ الاسْتِيقَاظِ عَادَةً</a:t>
@@ -21850,6 +21982,7 @@
                   <a:srgbClr val="1B3B6F"/>
                 </a:solidFill>
                 <a:latin typeface="Amiri" pitchFamily="2" charset="-78"/>
+                <a:ea typeface="Amiri" pitchFamily="2" charset="-78"/>
                 <a:cs typeface="Amiri" pitchFamily="2" charset="-78"/>
               </a:rPr>
               <a:t>البَيْضُ وَالخُبْزُ</a:t>
@@ -21888,6 +22021,7 @@
                   <a:srgbClr val="1B3B6F"/>
                 </a:solidFill>
                 <a:latin typeface="Amiri" pitchFamily="2" charset="-78"/>
+                <a:ea typeface="Amiri" pitchFamily="2" charset="-78"/>
                 <a:cs typeface="Amiri" pitchFamily="2" charset="-78"/>
               </a:rPr>
               <a:t>الإِفْطَارُ المُفَضَّلُ</a:t>
@@ -22029,6 +22163,7 @@
                   <a:srgbClr val="1B3B6F"/>
                 </a:solidFill>
                 <a:latin typeface="Amiri" pitchFamily="2" charset="-78"/>
+                <a:ea typeface="Amiri" pitchFamily="2" charset="-78"/>
                 <a:cs typeface="Amiri" pitchFamily="2" charset="-78"/>
               </a:rPr>
               <a:t>بِالحَافِلَةِ</a:t>
@@ -22067,6 +22202,7 @@
                   <a:srgbClr val="1B3B6F"/>
                 </a:solidFill>
                 <a:latin typeface="Amiri" pitchFamily="2" charset="-78"/>
+                <a:ea typeface="Amiri" pitchFamily="2" charset="-78"/>
                 <a:cs typeface="Amiri" pitchFamily="2" charset="-78"/>
               </a:rPr>
               <a:t>كَيْفَ تَذْهَبُ إِلَى المَدْرَسَةِ؟</a:t>
@@ -22208,6 +22344,7 @@
                   <a:srgbClr val="1B3B6F"/>
                 </a:solidFill>
                 <a:latin typeface="Amiri" pitchFamily="2" charset="-78"/>
+                <a:ea typeface="Amiri" pitchFamily="2" charset="-78"/>
                 <a:cs typeface="Amiri" pitchFamily="2" charset="-78"/>
               </a:rPr>
               <a:t>كُرَةُ السَّلَّةِ</a:t>
@@ -22246,6 +22383,7 @@
                   <a:srgbClr val="1B3B6F"/>
                 </a:solidFill>
                 <a:latin typeface="Amiri" pitchFamily="2" charset="-78"/>
+                <a:ea typeface="Amiri" pitchFamily="2" charset="-78"/>
                 <a:cs typeface="Amiri" pitchFamily="2" charset="-78"/>
               </a:rPr>
               <a:t>نَشَاطٌ تُمَارِسُهُ بَعْدَ المَدْرَسَةِ</a:t>
@@ -22387,6 +22525,7 @@
                   <a:srgbClr val="1B3B6F"/>
                 </a:solidFill>
                 <a:latin typeface="Amiri" pitchFamily="2" charset="-78"/>
+                <a:ea typeface="Amiri" pitchFamily="2" charset="-78"/>
                 <a:cs typeface="Amiri" pitchFamily="2" charset="-78"/>
               </a:rPr>
               <a:t>أُحِبُّ يَوْمَ السَّبْتِ لِأَنِّي أَسْتَيْقِظُ مُتَأَخِّرًا.</a:t>
@@ -22425,6 +22564,7 @@
                   <a:srgbClr val="1B3B6F"/>
                 </a:solidFill>
                 <a:latin typeface="Amiri" pitchFamily="2" charset="-78"/>
+                <a:ea typeface="Amiri" pitchFamily="2" charset="-78"/>
                 <a:cs typeface="Amiri" pitchFamily="2" charset="-78"/>
               </a:rPr>
               <a:t>جُمْلَةٌ عَنْ يَوْمِكَ المُفَضَّلِ وَلِمَاذَا</a:t>
@@ -22634,6 +22774,7 @@
                   <a:srgbClr val="D4AF37"/>
                 </a:solidFill>
                 <a:latin typeface="Amiri" pitchFamily="2" charset="-78"/>
+                <a:ea typeface="Amiri" pitchFamily="2" charset="-78"/>
                 <a:cs typeface="Amiri" pitchFamily="2" charset="-78"/>
               </a:rPr>
               <a:t>م</a:t>
@@ -22954,6 +23095,7 @@
                   <a:srgbClr val="8A6D1E"/>
                 </a:solidFill>
                 <a:latin typeface="Amiri" pitchFamily="2" charset="-78"/>
+                <a:ea typeface="Amiri" pitchFamily="2" charset="-78"/>
                 <a:cs typeface="Amiri" pitchFamily="2" charset="-78"/>
               </a:rPr>
               <a:t>رِسَالَةٌ إِلَى صَدِيقَتِي</a:t>
@@ -23429,6 +23571,7 @@
                   <a:srgbClr val="1B3B6F"/>
                 </a:solidFill>
                 <a:latin typeface="Amiri" pitchFamily="2" charset="-78"/>
+                <a:ea typeface="Amiri" pitchFamily="2" charset="-78"/>
                 <a:cs typeface="Amiri" pitchFamily="2" charset="-78"/>
               </a:rPr>
               <a:t>مَرْحَبًا يَا … ،</a:t>
@@ -23505,6 +23648,7 @@
                   <a:srgbClr val="1B3B6F"/>
                 </a:solidFill>
                 <a:latin typeface="Amiri" pitchFamily="2" charset="-78"/>
+                <a:ea typeface="Amiri" pitchFamily="2" charset="-78"/>
                 <a:cs typeface="Amiri" pitchFamily="2" charset="-78"/>
               </a:rPr>
               <a:t>أُرِيدُ أَنْ أُخْبِرَكَ عَنْ يَوْمِي.</a:t>
@@ -23581,6 +23725,7 @@
                   <a:srgbClr val="1B3B6F"/>
                 </a:solidFill>
                 <a:latin typeface="Amiri" pitchFamily="2" charset="-78"/>
+                <a:ea typeface="Amiri" pitchFamily="2" charset="-78"/>
                 <a:cs typeface="Amiri" pitchFamily="2" charset="-78"/>
               </a:rPr>
               <a:t>أَصِلُ إِلَى المَدْرَسَةِ فِي …</a:t>
@@ -23657,6 +23802,7 @@
                   <a:srgbClr val="1B3B6F"/>
                 </a:solidFill>
                 <a:latin typeface="Amiri" pitchFamily="2" charset="-78"/>
+                <a:ea typeface="Amiri" pitchFamily="2" charset="-78"/>
                 <a:cs typeface="Amiri" pitchFamily="2" charset="-78"/>
               </a:rPr>
               <a:t>مَعَ تَحِيَّاتِي،</a:t>
@@ -23828,6 +23974,7 @@
                   <a:srgbClr val="D4AF37"/>
                 </a:solidFill>
                 <a:latin typeface="Amiri" pitchFamily="2" charset="-78"/>
+                <a:ea typeface="Amiri" pitchFamily="2" charset="-78"/>
                 <a:cs typeface="Amiri" pitchFamily="2" charset="-78"/>
               </a:rPr>
               <a:t>م</a:t>
@@ -24148,6 +24295,7 @@
                   <a:srgbClr val="8A6D1E"/>
                 </a:solidFill>
                 <a:latin typeface="Amiri" pitchFamily="2" charset="-78"/>
+                <a:ea typeface="Amiri" pitchFamily="2" charset="-78"/>
                 <a:cs typeface="Amiri" pitchFamily="2" charset="-78"/>
               </a:rPr>
               <a:t>نَصُّ السُّؤَالِ</a:t>
@@ -24428,6 +24576,7 @@
                   <a:srgbClr val="1B3B6F"/>
                 </a:solidFill>
                 <a:latin typeface="Amiri" pitchFamily="2" charset="-78"/>
+                <a:ea typeface="Amiri" pitchFamily="2" charset="-78"/>
                 <a:cs typeface="Amiri" pitchFamily="2" charset="-78"/>
               </a:rPr>
               <a:t>لَكَ صَدِيقٌ جَدِيدٌ فِي الأُرْدُنِّ. اكْتُبْ رِسَالَةً إِلِكْتِرُونِيَّةً عَنْ رُوتِينِكَ اليَوْمِيِّ (٨٠–٩٠ كَلِمَةً).</a:t>
@@ -24569,6 +24718,7 @@
                   <a:srgbClr val="1B3B6F"/>
                 </a:solidFill>
                 <a:latin typeface="Amiri" pitchFamily="2" charset="-78"/>
+                <a:ea typeface="Amiri" pitchFamily="2" charset="-78"/>
                 <a:cs typeface="Amiri" pitchFamily="2" charset="-78"/>
               </a:rPr>
               <a:t>مَتَى تَسْتَيْقِظُ، وَمَاذَا تَفْعَلُ قَبْلَ المَدْرَسَةِ؟</a:t>
@@ -24710,6 +24860,7 @@
                   <a:srgbClr val="1B3B6F"/>
                 </a:solidFill>
                 <a:latin typeface="Amiri" pitchFamily="2" charset="-78"/>
+                <a:ea typeface="Amiri" pitchFamily="2" charset="-78"/>
                 <a:cs typeface="Amiri" pitchFamily="2" charset="-78"/>
               </a:rPr>
               <a:t>كَيْفَ تَذْهَبُ إِلَى المَدْرَسَةِ، وَمَتَى تَصِلُ؟</a:t>
@@ -24851,6 +25002,7 @@
                   <a:srgbClr val="1B3B6F"/>
                 </a:solidFill>
                 <a:latin typeface="Amiri" pitchFamily="2" charset="-78"/>
+                <a:ea typeface="Amiri" pitchFamily="2" charset="-78"/>
                 <a:cs typeface="Amiri" pitchFamily="2" charset="-78"/>
               </a:rPr>
               <a:t>مَاذَا تَفْعَلُ بَعْدَ المَدْرَسَةِ؟</a:t>
@@ -24992,6 +25144,7 @@
                   <a:srgbClr val="1B3B6F"/>
                 </a:solidFill>
                 <a:latin typeface="Amiri" pitchFamily="2" charset="-78"/>
+                <a:ea typeface="Amiri" pitchFamily="2" charset="-78"/>
                 <a:cs typeface="Amiri" pitchFamily="2" charset="-78"/>
               </a:rPr>
               <a:t>مَا رَأْيُكَ فِي رُوتِينِكَ؟ وَلِمَاذَا؟</a:t>
@@ -25201,6 +25354,7 @@
                   <a:srgbClr val="D4AF37"/>
                 </a:solidFill>
                 <a:latin typeface="Amiri" pitchFamily="2" charset="-78"/>
+                <a:ea typeface="Amiri" pitchFamily="2" charset="-78"/>
                 <a:cs typeface="Amiri" pitchFamily="2" charset="-78"/>
               </a:rPr>
               <a:t>م</a:t>
@@ -25521,6 +25675,7 @@
                   <a:srgbClr val="8A6D1E"/>
                 </a:solidFill>
                 <a:latin typeface="Amiri" pitchFamily="2" charset="-78"/>
+                <a:ea typeface="Amiri" pitchFamily="2" charset="-78"/>
                 <a:cs typeface="Amiri" pitchFamily="2" charset="-78"/>
               </a:rPr>
               <a:t>قَوَالِبُ الكِتَابَةِ</a:t>
@@ -25801,6 +25956,7 @@
                   <a:srgbClr val="1B3B6F"/>
                 </a:solidFill>
                 <a:latin typeface="Amiri" pitchFamily="2" charset="-78"/>
+                <a:ea typeface="Amiri" pitchFamily="2" charset="-78"/>
                 <a:cs typeface="Amiri" pitchFamily="2" charset="-78"/>
               </a:rPr>
               <a:t>مَرْحَبًا يَا ______ ، أَنَا ______ .</a:t>
@@ -26007,6 +26163,7 @@
                   <a:srgbClr val="1B3B6F"/>
                 </a:solidFill>
                 <a:latin typeface="Amiri" pitchFamily="2" charset="-78"/>
+                <a:ea typeface="Amiri" pitchFamily="2" charset="-78"/>
                 <a:cs typeface="Amiri" pitchFamily="2" charset="-78"/>
               </a:rPr>
               <a:t>أَسْتَيْقِظُ فِي السَّاعَةِ ______ . أَوَّلًا ______ ، ثُمَّ ______ .</a:t>
@@ -26213,6 +26370,7 @@
                   <a:srgbClr val="1B3B6F"/>
                 </a:solidFill>
                 <a:latin typeface="Amiri" pitchFamily="2" charset="-78"/>
+                <a:ea typeface="Amiri" pitchFamily="2" charset="-78"/>
                 <a:cs typeface="Amiri" pitchFamily="2" charset="-78"/>
               </a:rPr>
               <a:t>أَذْهَبُ إِلَى المَدْرَسَةِ ______ ، وَأَصِلُ فِي ______ .</a:t>
@@ -26419,6 +26577,7 @@
                   <a:srgbClr val="1B3B6F"/>
                 </a:solidFill>
                 <a:latin typeface="Amiri" pitchFamily="2" charset="-78"/>
+                <a:ea typeface="Amiri" pitchFamily="2" charset="-78"/>
                 <a:cs typeface="Amiri" pitchFamily="2" charset="-78"/>
               </a:rPr>
               <a:t>بَعْدَ المَدْرَسَةِ ______ ، وَفِي المَسَاءِ ______ .</a:t>
@@ -26625,6 +26784,7 @@
                   <a:srgbClr val="1B3B6F"/>
                 </a:solidFill>
                 <a:latin typeface="Amiri" pitchFamily="2" charset="-78"/>
+                <a:ea typeface="Amiri" pitchFamily="2" charset="-78"/>
                 <a:cs typeface="Amiri" pitchFamily="2" charset="-78"/>
               </a:rPr>
               <a:t>أُحِبُّ رُوتِينِي لِأَنَّهُ ______ .</a:t>
@@ -26831,6 +26991,7 @@
                   <a:srgbClr val="1B3B6F"/>
                 </a:solidFill>
                 <a:latin typeface="Amiri" pitchFamily="2" charset="-78"/>
+                <a:ea typeface="Amiri" pitchFamily="2" charset="-78"/>
                 <a:cs typeface="Amiri" pitchFamily="2" charset="-78"/>
               </a:rPr>
               <a:t>مَعَ السَّلَامَةِ، ______</a:t>
@@ -27070,13 +27231,9 @@
     <a:fontScheme name="Office">
       <a:majorFont>
         <a:latin typeface="Calibri Light" panose="020F0302020204030204"/>
-        <a:ea typeface=""/>
-        <a:cs typeface=""/>
-        <a:font script="Jpan" typeface="游ゴシック Light"/>
-        <a:font script="Hang" typeface="맑은 고딕"/>
-        <a:font script="Hans" typeface="等线 Light"/>
-        <a:font script="Hant" typeface="新細明體"/>
-        <a:font script="Arab" typeface="Times New Roman"/>
+        <a:ea typeface="Amiri" pitchFamily="2" charset="-78"/>
+        <a:cs typeface="Amiri" pitchFamily="2" charset="-78"/>
+        <a:font script="Arab" typeface="Amiri"/>
         <a:font script="Hebr" typeface="Times New Roman"/>
         <a:font script="Thai" typeface="Angsana New"/>
         <a:font script="Ethi" typeface="Nyala"/>
@@ -27122,13 +27279,9 @@
       </a:majorFont>
       <a:minorFont>
         <a:latin typeface="Calibri" panose="020F0502020204030204"/>
-        <a:ea typeface=""/>
-        <a:cs typeface=""/>
-        <a:font script="Jpan" typeface="游ゴシック"/>
-        <a:font script="Hang" typeface="맑은 고딕"/>
-        <a:font script="Hans" typeface="等线"/>
-        <a:font script="Hant" typeface="新細明體"/>
-        <a:font script="Arab" typeface="Arial"/>
+        <a:ea typeface="Amiri" pitchFamily="2" charset="-78"/>
+        <a:cs typeface="Amiri" pitchFamily="2" charset="-78"/>
+        <a:font script="Arab" typeface="Amiri"/>
         <a:font script="Hebr" typeface="Arial"/>
         <a:font script="Thai" typeface="Cordia New"/>
         <a:font script="Ethi" typeface="Nyala"/>

--- a/Topic_A/Exam_Practice/AT-A-L01_Writing_Workshop_Time_and_Daily_Routine.pptx
+++ b/Topic_A/Exam_Practice/AT-A-L01_Writing_Workshop_Time_and_Daily_Routine.pptx
@@ -3854,7 +3854,7 @@
                 <a:solidFill>
                   <a:srgbClr val="FFFFFF"/>
                 </a:solidFill>
-                <a:latin typeface="Calibri" pitchFamily="34" charset="0"/>
+                <a:latin typeface="Amiri" pitchFamily="2" charset="-78"/>
                 <a:ea typeface="Amiri" pitchFamily="2" charset="-78"/>
                 <a:cs typeface="Amiri" pitchFamily="2" charset="-78"/>
               </a:rPr>
@@ -3920,7 +3920,7 @@
                 <a:solidFill>
                   <a:srgbClr val="FFFFFF"/>
                 </a:solidFill>
-                <a:latin typeface="Calibri" pitchFamily="34" charset="0"/>
+                <a:latin typeface="Amiri" pitchFamily="2" charset="-78"/>
                 <a:ea typeface="Amiri" pitchFamily="2" charset="-78"/>
                 <a:cs typeface="Amiri" pitchFamily="2" charset="-78"/>
               </a:rPr>
@@ -3986,7 +3986,7 @@
                 <a:solidFill>
                   <a:srgbClr val="FFFFFF"/>
                 </a:solidFill>
-                <a:latin typeface="Calibri" pitchFamily="34" charset="0"/>
+                <a:latin typeface="Amiri" pitchFamily="2" charset="-78"/>
                 <a:ea typeface="Amiri" pitchFamily="2" charset="-78"/>
                 <a:cs typeface="Amiri" pitchFamily="2" charset="-78"/>
               </a:rPr>
@@ -4052,7 +4052,7 @@
                 <a:solidFill>
                   <a:srgbClr val="FFFFFF"/>
                 </a:solidFill>
-                <a:latin typeface="Calibri" pitchFamily="34" charset="0"/>
+                <a:latin typeface="Amiri" pitchFamily="2" charset="-78"/>
                 <a:ea typeface="Amiri" pitchFamily="2" charset="-78"/>
                 <a:cs typeface="Amiri" pitchFamily="2" charset="-78"/>
               </a:rPr>
@@ -4850,7 +4850,7 @@
                 <a:solidFill>
                   <a:srgbClr val="FFFFFF"/>
                 </a:solidFill>
-                <a:latin typeface="Calibri" pitchFamily="34" charset="0"/>
+                <a:latin typeface="Amiri" pitchFamily="2" charset="-78"/>
                 <a:ea typeface="Amiri" pitchFamily="2" charset="-78"/>
                 <a:cs typeface="Amiri" pitchFamily="2" charset="-78"/>
               </a:rPr>
@@ -4916,7 +4916,7 @@
                 <a:solidFill>
                   <a:srgbClr val="FFFFFF"/>
                 </a:solidFill>
-                <a:latin typeface="Calibri" pitchFamily="34" charset="0"/>
+                <a:latin typeface="Amiri" pitchFamily="2" charset="-78"/>
                 <a:ea typeface="Amiri" pitchFamily="2" charset="-78"/>
                 <a:cs typeface="Amiri" pitchFamily="2" charset="-78"/>
               </a:rPr>
@@ -4982,7 +4982,7 @@
                 <a:solidFill>
                   <a:srgbClr val="FFFFFF"/>
                 </a:solidFill>
-                <a:latin typeface="Calibri" pitchFamily="34" charset="0"/>
+                <a:latin typeface="Amiri" pitchFamily="2" charset="-78"/>
                 <a:ea typeface="Amiri" pitchFamily="2" charset="-78"/>
                 <a:cs typeface="Amiri" pitchFamily="2" charset="-78"/>
               </a:rPr>
@@ -5048,7 +5048,7 @@
                 <a:solidFill>
                   <a:srgbClr val="FFFFFF"/>
                 </a:solidFill>
-                <a:latin typeface="Calibri" pitchFamily="34" charset="0"/>
+                <a:latin typeface="Amiri" pitchFamily="2" charset="-78"/>
                 <a:ea typeface="Amiri" pitchFamily="2" charset="-78"/>
                 <a:cs typeface="Amiri" pitchFamily="2" charset="-78"/>
               </a:rPr>
@@ -8608,7 +8608,7 @@
                 <a:solidFill>
                   <a:srgbClr val="FFFFFF"/>
                 </a:solidFill>
-                <a:latin typeface="Calibri" pitchFamily="34" charset="0"/>
+                <a:latin typeface="Amiri" pitchFamily="2" charset="-78"/>
                 <a:ea typeface="Amiri" pitchFamily="2" charset="-78"/>
                 <a:cs typeface="Amiri" pitchFamily="2" charset="-78"/>
               </a:rPr>
@@ -8674,7 +8674,7 @@
                 <a:solidFill>
                   <a:srgbClr val="FFFFFF"/>
                 </a:solidFill>
-                <a:latin typeface="Calibri" pitchFamily="34" charset="0"/>
+                <a:latin typeface="Amiri" pitchFamily="2" charset="-78"/>
                 <a:ea typeface="Amiri" pitchFamily="2" charset="-78"/>
                 <a:cs typeface="Amiri" pitchFamily="2" charset="-78"/>
               </a:rPr>
@@ -8740,7 +8740,7 @@
                 <a:solidFill>
                   <a:srgbClr val="FFFFFF"/>
                 </a:solidFill>
-                <a:latin typeface="Calibri" pitchFamily="34" charset="0"/>
+                <a:latin typeface="Amiri" pitchFamily="2" charset="-78"/>
                 <a:ea typeface="Amiri" pitchFamily="2" charset="-78"/>
                 <a:cs typeface="Amiri" pitchFamily="2" charset="-78"/>
               </a:rPr>
@@ -8806,7 +8806,7 @@
                 <a:solidFill>
                   <a:srgbClr val="FFFFFF"/>
                 </a:solidFill>
-                <a:latin typeface="Calibri" pitchFamily="34" charset="0"/>
+                <a:latin typeface="Amiri" pitchFamily="2" charset="-78"/>
                 <a:ea typeface="Amiri" pitchFamily="2" charset="-78"/>
                 <a:cs typeface="Amiri" pitchFamily="2" charset="-78"/>
               </a:rPr>
@@ -9658,7 +9658,7 @@
                 <a:solidFill>
                   <a:srgbClr val="FFFFFF"/>
                 </a:solidFill>
-                <a:latin typeface="Calibri" pitchFamily="34" charset="0"/>
+                <a:latin typeface="Amiri" pitchFamily="2" charset="-78"/>
                 <a:ea typeface="Amiri" pitchFamily="2" charset="-78"/>
                 <a:cs typeface="Amiri" pitchFamily="2" charset="-78"/>
               </a:rPr>
@@ -9724,7 +9724,7 @@
                 <a:solidFill>
                   <a:srgbClr val="FFFFFF"/>
                 </a:solidFill>
-                <a:latin typeface="Calibri" pitchFamily="34" charset="0"/>
+                <a:latin typeface="Amiri" pitchFamily="2" charset="-78"/>
                 <a:ea typeface="Amiri" pitchFamily="2" charset="-78"/>
                 <a:cs typeface="Amiri" pitchFamily="2" charset="-78"/>
               </a:rPr>
@@ -9790,7 +9790,7 @@
                 <a:solidFill>
                   <a:srgbClr val="FFFFFF"/>
                 </a:solidFill>
-                <a:latin typeface="Calibri" pitchFamily="34" charset="0"/>
+                <a:latin typeface="Amiri" pitchFamily="2" charset="-78"/>
                 <a:ea typeface="Amiri" pitchFamily="2" charset="-78"/>
                 <a:cs typeface="Amiri" pitchFamily="2" charset="-78"/>
               </a:rPr>
@@ -9856,7 +9856,7 @@
                 <a:solidFill>
                   <a:srgbClr val="FFFFFF"/>
                 </a:solidFill>
-                <a:latin typeface="Calibri" pitchFamily="34" charset="0"/>
+                <a:latin typeface="Amiri" pitchFamily="2" charset="-78"/>
                 <a:ea typeface="Amiri" pitchFamily="2" charset="-78"/>
                 <a:cs typeface="Amiri" pitchFamily="2" charset="-78"/>
               </a:rPr>
@@ -10708,7 +10708,7 @@
                 <a:solidFill>
                   <a:srgbClr val="FFFFFF"/>
                 </a:solidFill>
-                <a:latin typeface="Calibri" pitchFamily="34" charset="0"/>
+                <a:latin typeface="Amiri" pitchFamily="2" charset="-78"/>
                 <a:ea typeface="Amiri" pitchFamily="2" charset="-78"/>
                 <a:cs typeface="Amiri" pitchFamily="2" charset="-78"/>
               </a:rPr>
@@ -10774,7 +10774,7 @@
                 <a:solidFill>
                   <a:srgbClr val="FFFFFF"/>
                 </a:solidFill>
-                <a:latin typeface="Calibri" pitchFamily="34" charset="0"/>
+                <a:latin typeface="Amiri" pitchFamily="2" charset="-78"/>
                 <a:ea typeface="Amiri" pitchFamily="2" charset="-78"/>
                 <a:cs typeface="Amiri" pitchFamily="2" charset="-78"/>
               </a:rPr>
@@ -10840,7 +10840,7 @@
                 <a:solidFill>
                   <a:srgbClr val="FFFFFF"/>
                 </a:solidFill>
-                <a:latin typeface="Calibri" pitchFamily="34" charset="0"/>
+                <a:latin typeface="Amiri" pitchFamily="2" charset="-78"/>
                 <a:ea typeface="Amiri" pitchFamily="2" charset="-78"/>
                 <a:cs typeface="Amiri" pitchFamily="2" charset="-78"/>
               </a:rPr>
@@ -10906,7 +10906,7 @@
                 <a:solidFill>
                   <a:srgbClr val="FFFFFF"/>
                 </a:solidFill>
-                <a:latin typeface="Calibri" pitchFamily="34" charset="0"/>
+                <a:latin typeface="Amiri" pitchFamily="2" charset="-78"/>
                 <a:ea typeface="Amiri" pitchFamily="2" charset="-78"/>
                 <a:cs typeface="Amiri" pitchFamily="2" charset="-78"/>
               </a:rPr>
